--- a/Part 1/Vaibhav_Soni_Capstone.pptx
+++ b/Part 1/Vaibhav_Soni_Capstone.pptx
@@ -3969,6 +3969,18 @@
   <p:clrMapOvr>
     <a:masterClrMapping/>
   </p:clrMapOvr>
+  <mc:AlternateContent xmlns:mc="http://schemas.openxmlformats.org/markup-compatibility/2006">
+    <mc:Choice xmlns:p159="http://schemas.microsoft.com/office/powerpoint/2015/09/main" Requires="p159">
+      <p:transition xmlns:p14="http://schemas.microsoft.com/office/powerpoint/2010/main" spd="slow" p14:dur="2000">
+        <p159:morph option="byObject"/>
+      </p:transition>
+    </mc:Choice>
+    <mc:Fallback>
+      <p:transition spd="slow">
+        <p:fade/>
+      </p:transition>
+    </mc:Fallback>
+  </mc:AlternateContent>
 </p:sld>
 </file>
 
@@ -4985,6 +4997,18 @@
   <p:clrMapOvr>
     <a:masterClrMapping/>
   </p:clrMapOvr>
+  <mc:AlternateContent xmlns:mc="http://schemas.openxmlformats.org/markup-compatibility/2006">
+    <mc:Choice xmlns:p159="http://schemas.microsoft.com/office/powerpoint/2015/09/main" Requires="p159">
+      <p:transition xmlns:p14="http://schemas.microsoft.com/office/powerpoint/2010/main" spd="slow" p14:dur="2000">
+        <p159:morph option="byObject"/>
+      </p:transition>
+    </mc:Choice>
+    <mc:Fallback>
+      <p:transition spd="slow">
+        <p:fade/>
+      </p:transition>
+    </mc:Fallback>
+  </mc:AlternateContent>
 </p:sld>
 </file>
 
@@ -6316,6 +6340,18 @@
   <p:clrMapOvr>
     <a:masterClrMapping/>
   </p:clrMapOvr>
+  <mc:AlternateContent xmlns:mc="http://schemas.openxmlformats.org/markup-compatibility/2006">
+    <mc:Choice xmlns:p159="http://schemas.microsoft.com/office/powerpoint/2015/09/main" Requires="p159">
+      <p:transition xmlns:p14="http://schemas.microsoft.com/office/powerpoint/2010/main" spd="slow" p14:dur="2000">
+        <p159:morph option="byObject"/>
+      </p:transition>
+    </mc:Choice>
+    <mc:Fallback>
+      <p:transition spd="slow">
+        <p:fade/>
+      </p:transition>
+    </mc:Fallback>
+  </mc:AlternateContent>
 </p:sld>
 </file>
 
@@ -9477,6 +9513,18 @@
   <p:clrMapOvr>
     <a:masterClrMapping/>
   </p:clrMapOvr>
+  <mc:AlternateContent xmlns:mc="http://schemas.openxmlformats.org/markup-compatibility/2006">
+    <mc:Choice xmlns:p159="http://schemas.microsoft.com/office/powerpoint/2015/09/main" Requires="p159">
+      <p:transition xmlns:p14="http://schemas.microsoft.com/office/powerpoint/2010/main" spd="slow" p14:dur="2000">
+        <p159:morph option="byObject"/>
+      </p:transition>
+    </mc:Choice>
+    <mc:Fallback>
+      <p:transition spd="slow">
+        <p:fade/>
+      </p:transition>
+    </mc:Fallback>
+  </mc:AlternateContent>
 </p:sld>
 </file>
 
@@ -10859,6 +10907,18 @@
   <p:clrMapOvr>
     <a:masterClrMapping/>
   </p:clrMapOvr>
+  <mc:AlternateContent xmlns:mc="http://schemas.openxmlformats.org/markup-compatibility/2006">
+    <mc:Choice xmlns:p159="http://schemas.microsoft.com/office/powerpoint/2015/09/main" Requires="p159">
+      <p:transition xmlns:p14="http://schemas.microsoft.com/office/powerpoint/2010/main" spd="slow" p14:dur="2000">
+        <p159:morph option="byObject"/>
+      </p:transition>
+    </mc:Choice>
+    <mc:Fallback>
+      <p:transition spd="slow">
+        <p:fade/>
+      </p:transition>
+    </mc:Fallback>
+  </mc:AlternateContent>
 </p:sld>
 </file>
 
@@ -12997,6 +13057,18 @@
   <p:clrMapOvr>
     <a:masterClrMapping/>
   </p:clrMapOvr>
+  <mc:AlternateContent xmlns:mc="http://schemas.openxmlformats.org/markup-compatibility/2006">
+    <mc:Choice xmlns:p159="http://schemas.microsoft.com/office/powerpoint/2015/09/main" Requires="p159">
+      <p:transition xmlns:p14="http://schemas.microsoft.com/office/powerpoint/2010/main" spd="slow" p14:dur="2000">
+        <p159:morph option="byObject"/>
+      </p:transition>
+    </mc:Choice>
+    <mc:Fallback>
+      <p:transition spd="slow">
+        <p:fade/>
+      </p:transition>
+    </mc:Fallback>
+  </mc:AlternateContent>
 </p:sld>
 </file>
 
@@ -14656,6 +14728,18 @@
   <p:clrMapOvr>
     <a:masterClrMapping/>
   </p:clrMapOvr>
+  <mc:AlternateContent xmlns:mc="http://schemas.openxmlformats.org/markup-compatibility/2006">
+    <mc:Choice xmlns:p159="http://schemas.microsoft.com/office/powerpoint/2015/09/main" Requires="p159">
+      <p:transition xmlns:p14="http://schemas.microsoft.com/office/powerpoint/2010/main" spd="slow" p14:dur="2000">
+        <p159:morph option="byObject"/>
+      </p:transition>
+    </mc:Choice>
+    <mc:Fallback>
+      <p:transition spd="slow">
+        <p:fade/>
+      </p:transition>
+    </mc:Fallback>
+  </mc:AlternateContent>
 </p:sld>
 </file>
 
@@ -16247,6 +16331,18 @@
   <p:clrMapOvr>
     <a:masterClrMapping/>
   </p:clrMapOvr>
+  <mc:AlternateContent xmlns:mc="http://schemas.openxmlformats.org/markup-compatibility/2006">
+    <mc:Choice xmlns:p159="http://schemas.microsoft.com/office/powerpoint/2015/09/main" Requires="p159">
+      <p:transition xmlns:p14="http://schemas.microsoft.com/office/powerpoint/2010/main" spd="slow" p14:dur="2000">
+        <p159:morph option="byObject"/>
+      </p:transition>
+    </mc:Choice>
+    <mc:Fallback>
+      <p:transition spd="slow">
+        <p:fade/>
+      </p:transition>
+    </mc:Fallback>
+  </mc:AlternateContent>
 </p:sld>
 </file>
 
@@ -17960,6 +18056,18 @@
   <p:clrMapOvr>
     <a:masterClrMapping/>
   </p:clrMapOvr>
+  <mc:AlternateContent xmlns:mc="http://schemas.openxmlformats.org/markup-compatibility/2006">
+    <mc:Choice xmlns:p159="http://schemas.microsoft.com/office/powerpoint/2015/09/main" Requires="p159">
+      <p:transition xmlns:p14="http://schemas.microsoft.com/office/powerpoint/2010/main" spd="slow" p14:dur="2000">
+        <p159:morph option="byObject"/>
+      </p:transition>
+    </mc:Choice>
+    <mc:Fallback>
+      <p:transition spd="slow">
+        <p:fade/>
+      </p:transition>
+    </mc:Fallback>
+  </mc:AlternateContent>
 </p:sld>
 </file>
 
@@ -18243,220 +18351,6 @@
       </p:sp>
       <p:sp>
         <p:nvSpPr>
-          <p:cNvPr id="12" name="Shape 10"/>
-          <p:cNvSpPr/>
-          <p:nvPr/>
-        </p:nvSpPr>
-        <p:spPr>
-          <a:xfrm>
-            <a:off x="457200" y="2560320"/>
-            <a:ext cx="1554480" cy="658368"/>
-          </a:xfrm>
-          <a:prstGeom prst="rect">
-            <a:avLst/>
-          </a:prstGeom>
-          <a:solidFill>
-            <a:srgbClr val="E5F2EB"/>
-          </a:solidFill>
-          <a:ln w="6350">
-            <a:solidFill>
-              <a:srgbClr val="C8E6D4"/>
-            </a:solidFill>
-            <a:prstDash val="solid"/>
-          </a:ln>
-        </p:spPr>
-      </p:sp>
-      <p:sp>
-        <p:nvSpPr>
-          <p:cNvPr id="13" name="Shape 11"/>
-          <p:cNvSpPr/>
-          <p:nvPr/>
-        </p:nvSpPr>
-        <p:spPr>
-          <a:xfrm>
-            <a:off x="2194560" y="2560320"/>
-            <a:ext cx="1645920" cy="658368"/>
-          </a:xfrm>
-          <a:prstGeom prst="rect">
-            <a:avLst/>
-          </a:prstGeom>
-          <a:solidFill>
-            <a:srgbClr val="E5F2EB"/>
-          </a:solidFill>
-          <a:ln w="6350">
-            <a:solidFill>
-              <a:srgbClr val="C8E6D4"/>
-            </a:solidFill>
-            <a:prstDash val="solid"/>
-          </a:ln>
-        </p:spPr>
-      </p:sp>
-      <p:sp>
-        <p:nvSpPr>
-          <p:cNvPr id="14" name="Shape 12"/>
-          <p:cNvSpPr/>
-          <p:nvPr/>
-        </p:nvSpPr>
-        <p:spPr>
-          <a:xfrm>
-            <a:off x="457200" y="3337560"/>
-            <a:ext cx="1554480" cy="658368"/>
-          </a:xfrm>
-          <a:prstGeom prst="rect">
-            <a:avLst/>
-          </a:prstGeom>
-          <a:solidFill>
-            <a:srgbClr val="E5F2EB"/>
-          </a:solidFill>
-          <a:ln w="6350">
-            <a:solidFill>
-              <a:srgbClr val="C8E6D4"/>
-            </a:solidFill>
-            <a:prstDash val="solid"/>
-          </a:ln>
-        </p:spPr>
-        <p:txBody>
-          <a:bodyPr/>
-          <a:lstStyle/>
-          <a:p>
-            <a:endParaRPr lang="en-IN"/>
-          </a:p>
-        </p:txBody>
-      </p:sp>
-      <p:sp>
-        <p:nvSpPr>
-          <p:cNvPr id="15" name="Shape 13"/>
-          <p:cNvSpPr/>
-          <p:nvPr/>
-        </p:nvSpPr>
-        <p:spPr>
-          <a:xfrm>
-            <a:off x="2194560" y="3337560"/>
-            <a:ext cx="1645920" cy="658368"/>
-          </a:xfrm>
-          <a:prstGeom prst="rect">
-            <a:avLst/>
-          </a:prstGeom>
-          <a:solidFill>
-            <a:srgbClr val="E5F2EB"/>
-          </a:solidFill>
-          <a:ln w="6350">
-            <a:solidFill>
-              <a:srgbClr val="C8E6D4"/>
-            </a:solidFill>
-            <a:prstDash val="solid"/>
-          </a:ln>
-        </p:spPr>
-        <p:txBody>
-          <a:bodyPr/>
-          <a:lstStyle/>
-          <a:p>
-            <a:endParaRPr lang="en-IN"/>
-          </a:p>
-        </p:txBody>
-      </p:sp>
-      <p:sp>
-        <p:nvSpPr>
-          <p:cNvPr id="16" name="Shape 14"/>
-          <p:cNvSpPr/>
-          <p:nvPr/>
-        </p:nvSpPr>
-        <p:spPr>
-          <a:xfrm>
-            <a:off x="457200" y="4114800"/>
-            <a:ext cx="1554480" cy="658368"/>
-          </a:xfrm>
-          <a:prstGeom prst="rect">
-            <a:avLst/>
-          </a:prstGeom>
-          <a:solidFill>
-            <a:srgbClr val="E5F2EB"/>
-          </a:solidFill>
-          <a:ln w="6350">
-            <a:solidFill>
-              <a:srgbClr val="C8E6D4"/>
-            </a:solidFill>
-            <a:prstDash val="solid"/>
-          </a:ln>
-        </p:spPr>
-      </p:sp>
-      <p:sp>
-        <p:nvSpPr>
-          <p:cNvPr id="17" name="Shape 15"/>
-          <p:cNvSpPr/>
-          <p:nvPr/>
-        </p:nvSpPr>
-        <p:spPr>
-          <a:xfrm>
-            <a:off x="2194560" y="4114800"/>
-            <a:ext cx="1645920" cy="658368"/>
-          </a:xfrm>
-          <a:prstGeom prst="rect">
-            <a:avLst/>
-          </a:prstGeom>
-          <a:solidFill>
-            <a:srgbClr val="E5F2EB"/>
-          </a:solidFill>
-          <a:ln w="6350">
-            <a:solidFill>
-              <a:srgbClr val="C8E6D4"/>
-            </a:solidFill>
-            <a:prstDash val="solid"/>
-          </a:ln>
-        </p:spPr>
-      </p:sp>
-      <p:sp>
-        <p:nvSpPr>
-          <p:cNvPr id="18" name="Shape 16"/>
-          <p:cNvSpPr/>
-          <p:nvPr/>
-        </p:nvSpPr>
-        <p:spPr>
-          <a:xfrm>
-            <a:off x="457200" y="4892040"/>
-            <a:ext cx="1554480" cy="658368"/>
-          </a:xfrm>
-          <a:prstGeom prst="rect">
-            <a:avLst/>
-          </a:prstGeom>
-          <a:solidFill>
-            <a:srgbClr val="E5F2EB"/>
-          </a:solidFill>
-          <a:ln w="6350">
-            <a:solidFill>
-              <a:srgbClr val="C8E6D4"/>
-            </a:solidFill>
-            <a:prstDash val="solid"/>
-          </a:ln>
-        </p:spPr>
-      </p:sp>
-      <p:sp>
-        <p:nvSpPr>
-          <p:cNvPr id="19" name="Shape 17"/>
-          <p:cNvSpPr/>
-          <p:nvPr/>
-        </p:nvSpPr>
-        <p:spPr>
-          <a:xfrm>
-            <a:off x="2194560" y="4892040"/>
-            <a:ext cx="1645920" cy="658368"/>
-          </a:xfrm>
-          <a:prstGeom prst="rect">
-            <a:avLst/>
-          </a:prstGeom>
-          <a:solidFill>
-            <a:srgbClr val="E5F2EB"/>
-          </a:solidFill>
-          <a:ln w="6350">
-            <a:solidFill>
-              <a:srgbClr val="C8E6D4"/>
-            </a:solidFill>
-            <a:prstDash val="solid"/>
-          </a:ln>
-        </p:spPr>
-      </p:sp>
-      <p:sp>
-        <p:nvSpPr>
           <p:cNvPr id="20" name="Shape 18"/>
           <p:cNvSpPr/>
           <p:nvPr/>
@@ -18600,206 +18494,6 @@
       </p:sp>
       <p:sp>
         <p:nvSpPr>
-          <p:cNvPr id="26" name="Shape 24"/>
-          <p:cNvSpPr/>
-          <p:nvPr/>
-        </p:nvSpPr>
-        <p:spPr>
-          <a:xfrm>
-            <a:off x="4434840" y="2560320"/>
-            <a:ext cx="1554480" cy="658368"/>
-          </a:xfrm>
-          <a:prstGeom prst="rect">
-            <a:avLst/>
-          </a:prstGeom>
-          <a:solidFill>
-            <a:srgbClr val="E5F2EB"/>
-          </a:solidFill>
-          <a:ln w="6350">
-            <a:solidFill>
-              <a:srgbClr val="C8E6D4"/>
-            </a:solidFill>
-            <a:prstDash val="solid"/>
-          </a:ln>
-        </p:spPr>
-      </p:sp>
-      <p:sp>
-        <p:nvSpPr>
-          <p:cNvPr id="27" name="Shape 25"/>
-          <p:cNvSpPr/>
-          <p:nvPr/>
-        </p:nvSpPr>
-        <p:spPr>
-          <a:xfrm>
-            <a:off x="6172200" y="2560320"/>
-            <a:ext cx="1645920" cy="658368"/>
-          </a:xfrm>
-          <a:prstGeom prst="rect">
-            <a:avLst/>
-          </a:prstGeom>
-          <a:solidFill>
-            <a:srgbClr val="E5F2EB"/>
-          </a:solidFill>
-          <a:ln w="6350">
-            <a:solidFill>
-              <a:srgbClr val="C8E6D4"/>
-            </a:solidFill>
-            <a:prstDash val="solid"/>
-          </a:ln>
-        </p:spPr>
-      </p:sp>
-      <p:sp>
-        <p:nvSpPr>
-          <p:cNvPr id="28" name="Shape 26"/>
-          <p:cNvSpPr/>
-          <p:nvPr/>
-        </p:nvSpPr>
-        <p:spPr>
-          <a:xfrm>
-            <a:off x="4434840" y="3337560"/>
-            <a:ext cx="1554480" cy="658368"/>
-          </a:xfrm>
-          <a:prstGeom prst="rect">
-            <a:avLst/>
-          </a:prstGeom>
-          <a:solidFill>
-            <a:srgbClr val="E5F2EB"/>
-          </a:solidFill>
-          <a:ln w="6350">
-            <a:solidFill>
-              <a:srgbClr val="C8E6D4"/>
-            </a:solidFill>
-            <a:prstDash val="solid"/>
-          </a:ln>
-        </p:spPr>
-      </p:sp>
-      <p:sp>
-        <p:nvSpPr>
-          <p:cNvPr id="29" name="Shape 27"/>
-          <p:cNvSpPr/>
-          <p:nvPr/>
-        </p:nvSpPr>
-        <p:spPr>
-          <a:xfrm>
-            <a:off x="6172200" y="3337560"/>
-            <a:ext cx="1645920" cy="658368"/>
-          </a:xfrm>
-          <a:prstGeom prst="rect">
-            <a:avLst/>
-          </a:prstGeom>
-          <a:solidFill>
-            <a:srgbClr val="E5F2EB"/>
-          </a:solidFill>
-          <a:ln w="6350">
-            <a:solidFill>
-              <a:srgbClr val="C8E6D4"/>
-            </a:solidFill>
-            <a:prstDash val="solid"/>
-          </a:ln>
-        </p:spPr>
-      </p:sp>
-      <p:sp>
-        <p:nvSpPr>
-          <p:cNvPr id="30" name="Shape 28"/>
-          <p:cNvSpPr/>
-          <p:nvPr/>
-        </p:nvSpPr>
-        <p:spPr>
-          <a:xfrm>
-            <a:off x="4434840" y="4114800"/>
-            <a:ext cx="1554480" cy="658368"/>
-          </a:xfrm>
-          <a:prstGeom prst="rect">
-            <a:avLst/>
-          </a:prstGeom>
-          <a:solidFill>
-            <a:srgbClr val="E5F2EB"/>
-          </a:solidFill>
-          <a:ln w="6350">
-            <a:solidFill>
-              <a:srgbClr val="C8E6D4"/>
-            </a:solidFill>
-            <a:prstDash val="solid"/>
-          </a:ln>
-        </p:spPr>
-      </p:sp>
-      <p:sp>
-        <p:nvSpPr>
-          <p:cNvPr id="31" name="Shape 29"/>
-          <p:cNvSpPr/>
-          <p:nvPr/>
-        </p:nvSpPr>
-        <p:spPr>
-          <a:xfrm>
-            <a:off x="6172200" y="4114800"/>
-            <a:ext cx="1645920" cy="658368"/>
-          </a:xfrm>
-          <a:prstGeom prst="rect">
-            <a:avLst/>
-          </a:prstGeom>
-          <a:solidFill>
-            <a:srgbClr val="E5F2EB"/>
-          </a:solidFill>
-          <a:ln w="6350">
-            <a:solidFill>
-              <a:srgbClr val="C8E6D4"/>
-            </a:solidFill>
-            <a:prstDash val="solid"/>
-          </a:ln>
-        </p:spPr>
-      </p:sp>
-      <p:sp>
-        <p:nvSpPr>
-          <p:cNvPr id="32" name="Shape 30"/>
-          <p:cNvSpPr/>
-          <p:nvPr/>
-        </p:nvSpPr>
-        <p:spPr>
-          <a:xfrm>
-            <a:off x="4434840" y="4892040"/>
-            <a:ext cx="1554480" cy="658368"/>
-          </a:xfrm>
-          <a:prstGeom prst="rect">
-            <a:avLst/>
-          </a:prstGeom>
-          <a:solidFill>
-            <a:srgbClr val="E5F2EB"/>
-          </a:solidFill>
-          <a:ln w="6350">
-            <a:solidFill>
-              <a:srgbClr val="C8E6D4"/>
-            </a:solidFill>
-            <a:prstDash val="solid"/>
-          </a:ln>
-        </p:spPr>
-      </p:sp>
-      <p:sp>
-        <p:nvSpPr>
-          <p:cNvPr id="33" name="Shape 31"/>
-          <p:cNvSpPr/>
-          <p:nvPr/>
-        </p:nvSpPr>
-        <p:spPr>
-          <a:xfrm>
-            <a:off x="6172200" y="4892040"/>
-            <a:ext cx="1645920" cy="658368"/>
-          </a:xfrm>
-          <a:prstGeom prst="rect">
-            <a:avLst/>
-          </a:prstGeom>
-          <a:solidFill>
-            <a:srgbClr val="E5F2EB"/>
-          </a:solidFill>
-          <a:ln w="6350">
-            <a:solidFill>
-              <a:srgbClr val="C8E6D4"/>
-            </a:solidFill>
-            <a:prstDash val="solid"/>
-          </a:ln>
-        </p:spPr>
-      </p:sp>
-      <p:sp>
-        <p:nvSpPr>
           <p:cNvPr id="34" name="Shape 32"/>
           <p:cNvSpPr/>
           <p:nvPr/>
@@ -18943,206 +18637,6 @@
       </p:sp>
       <p:sp>
         <p:nvSpPr>
-          <p:cNvPr id="40" name="Shape 38"/>
-          <p:cNvSpPr/>
-          <p:nvPr/>
-        </p:nvSpPr>
-        <p:spPr>
-          <a:xfrm>
-            <a:off x="8412480" y="2560320"/>
-            <a:ext cx="1554480" cy="658368"/>
-          </a:xfrm>
-          <a:prstGeom prst="rect">
-            <a:avLst/>
-          </a:prstGeom>
-          <a:solidFill>
-            <a:srgbClr val="E5F2EB"/>
-          </a:solidFill>
-          <a:ln w="6350">
-            <a:solidFill>
-              <a:srgbClr val="C8E6D4"/>
-            </a:solidFill>
-            <a:prstDash val="solid"/>
-          </a:ln>
-        </p:spPr>
-      </p:sp>
-      <p:sp>
-        <p:nvSpPr>
-          <p:cNvPr id="41" name="Shape 39"/>
-          <p:cNvSpPr/>
-          <p:nvPr/>
-        </p:nvSpPr>
-        <p:spPr>
-          <a:xfrm>
-            <a:off x="10149840" y="2560320"/>
-            <a:ext cx="1645920" cy="658368"/>
-          </a:xfrm>
-          <a:prstGeom prst="rect">
-            <a:avLst/>
-          </a:prstGeom>
-          <a:solidFill>
-            <a:srgbClr val="E5F2EB"/>
-          </a:solidFill>
-          <a:ln w="6350">
-            <a:solidFill>
-              <a:srgbClr val="C8E6D4"/>
-            </a:solidFill>
-            <a:prstDash val="solid"/>
-          </a:ln>
-        </p:spPr>
-      </p:sp>
-      <p:sp>
-        <p:nvSpPr>
-          <p:cNvPr id="42" name="Shape 40"/>
-          <p:cNvSpPr/>
-          <p:nvPr/>
-        </p:nvSpPr>
-        <p:spPr>
-          <a:xfrm>
-            <a:off x="8412480" y="3337560"/>
-            <a:ext cx="1554480" cy="658368"/>
-          </a:xfrm>
-          <a:prstGeom prst="rect">
-            <a:avLst/>
-          </a:prstGeom>
-          <a:solidFill>
-            <a:srgbClr val="E5F2EB"/>
-          </a:solidFill>
-          <a:ln w="6350">
-            <a:solidFill>
-              <a:srgbClr val="C8E6D4"/>
-            </a:solidFill>
-            <a:prstDash val="solid"/>
-          </a:ln>
-        </p:spPr>
-      </p:sp>
-      <p:sp>
-        <p:nvSpPr>
-          <p:cNvPr id="43" name="Shape 41"/>
-          <p:cNvSpPr/>
-          <p:nvPr/>
-        </p:nvSpPr>
-        <p:spPr>
-          <a:xfrm>
-            <a:off x="10149840" y="3337560"/>
-            <a:ext cx="1645920" cy="658368"/>
-          </a:xfrm>
-          <a:prstGeom prst="rect">
-            <a:avLst/>
-          </a:prstGeom>
-          <a:solidFill>
-            <a:srgbClr val="E5F2EB"/>
-          </a:solidFill>
-          <a:ln w="6350">
-            <a:solidFill>
-              <a:srgbClr val="C8E6D4"/>
-            </a:solidFill>
-            <a:prstDash val="solid"/>
-          </a:ln>
-        </p:spPr>
-      </p:sp>
-      <p:sp>
-        <p:nvSpPr>
-          <p:cNvPr id="44" name="Shape 42"/>
-          <p:cNvSpPr/>
-          <p:nvPr/>
-        </p:nvSpPr>
-        <p:spPr>
-          <a:xfrm>
-            <a:off x="8412480" y="4114800"/>
-            <a:ext cx="1554480" cy="658368"/>
-          </a:xfrm>
-          <a:prstGeom prst="rect">
-            <a:avLst/>
-          </a:prstGeom>
-          <a:solidFill>
-            <a:srgbClr val="E5F2EB"/>
-          </a:solidFill>
-          <a:ln w="6350">
-            <a:solidFill>
-              <a:srgbClr val="C8E6D4"/>
-            </a:solidFill>
-            <a:prstDash val="solid"/>
-          </a:ln>
-        </p:spPr>
-      </p:sp>
-      <p:sp>
-        <p:nvSpPr>
-          <p:cNvPr id="45" name="Shape 43"/>
-          <p:cNvSpPr/>
-          <p:nvPr/>
-        </p:nvSpPr>
-        <p:spPr>
-          <a:xfrm>
-            <a:off x="10149840" y="4114800"/>
-            <a:ext cx="1645920" cy="658368"/>
-          </a:xfrm>
-          <a:prstGeom prst="rect">
-            <a:avLst/>
-          </a:prstGeom>
-          <a:solidFill>
-            <a:srgbClr val="E5F2EB"/>
-          </a:solidFill>
-          <a:ln w="6350">
-            <a:solidFill>
-              <a:srgbClr val="C8E6D4"/>
-            </a:solidFill>
-            <a:prstDash val="solid"/>
-          </a:ln>
-        </p:spPr>
-      </p:sp>
-      <p:sp>
-        <p:nvSpPr>
-          <p:cNvPr id="46" name="Shape 44"/>
-          <p:cNvSpPr/>
-          <p:nvPr/>
-        </p:nvSpPr>
-        <p:spPr>
-          <a:xfrm>
-            <a:off x="8412480" y="4892040"/>
-            <a:ext cx="1554480" cy="658368"/>
-          </a:xfrm>
-          <a:prstGeom prst="rect">
-            <a:avLst/>
-          </a:prstGeom>
-          <a:solidFill>
-            <a:srgbClr val="E5F2EB"/>
-          </a:solidFill>
-          <a:ln w="6350">
-            <a:solidFill>
-              <a:srgbClr val="C8E6D4"/>
-            </a:solidFill>
-            <a:prstDash val="solid"/>
-          </a:ln>
-        </p:spPr>
-      </p:sp>
-      <p:sp>
-        <p:nvSpPr>
-          <p:cNvPr id="47" name="Shape 45"/>
-          <p:cNvSpPr/>
-          <p:nvPr/>
-        </p:nvSpPr>
-        <p:spPr>
-          <a:xfrm>
-            <a:off x="10149840" y="4892040"/>
-            <a:ext cx="1645920" cy="658368"/>
-          </a:xfrm>
-          <a:prstGeom prst="rect">
-            <a:avLst/>
-          </a:prstGeom>
-          <a:solidFill>
-            <a:srgbClr val="E5F2EB"/>
-          </a:solidFill>
-          <a:ln w="6350">
-            <a:solidFill>
-              <a:srgbClr val="C8E6D4"/>
-            </a:solidFill>
-            <a:prstDash val="solid"/>
-          </a:ln>
-        </p:spPr>
-      </p:sp>
-      <p:sp>
-        <p:nvSpPr>
           <p:cNvPr id="48" name="Shape 46"/>
           <p:cNvSpPr/>
           <p:nvPr/>
@@ -19161,50 +18655,116 @@
           <a:ln/>
         </p:spPr>
       </p:sp>
-      <p:sp>
-        <p:nvSpPr>
-          <p:cNvPr id="49" name="Text 47"/>
-          <p:cNvSpPr/>
-          <p:nvPr/>
-        </p:nvSpPr>
-        <p:spPr>
-          <a:xfrm>
-            <a:off x="457200" y="6446520"/>
-            <a:ext cx="11430000" cy="201168"/>
-          </a:xfrm>
-          <a:prstGeom prst="rect">
-            <a:avLst/>
-          </a:prstGeom>
-          <a:noFill/>
-          <a:ln/>
-        </p:spPr>
-        <p:txBody>
-          <a:bodyPr wrap="square" rtlCol="0" anchor="ctr"/>
-          <a:lstStyle/>
-          <a:p>
-            <a:pPr marL="0" indent="0">
-              <a:buNone/>
-            </a:pPr>
-            <a:r>
-              <a:rPr lang="en-US" sz="800" dirty="0">
-                <a:solidFill>
-                  <a:srgbClr val="2EC47A"/>
-                </a:solidFill>
-                <a:latin typeface="Calibri" pitchFamily="34" charset="0"/>
-                <a:ea typeface="Calibri" pitchFamily="34" charset="-122"/>
-                <a:cs typeface="Calibri" pitchFamily="34" charset="-120"/>
-              </a:rPr>
-              <a:t>📌 Replace the placeholder blocks above with actual screenshots from your Celonis environment before submission.</a:t>
-            </a:r>
-            <a:endParaRPr lang="en-US" sz="800" dirty="0"/>
-          </a:p>
-        </p:txBody>
-      </p:sp>
+      <p:pic>
+        <p:nvPicPr>
+          <p:cNvPr id="56" name="Picture 55">
+            <a:extLst>
+              <a:ext uri="{FF2B5EF4-FFF2-40B4-BE49-F238E27FC236}">
+                <a16:creationId xmlns:a16="http://schemas.microsoft.com/office/drawing/2014/main" id="{770E4D65-DAF4-B79B-798F-E15776F71C9B}"/>
+              </a:ext>
+            </a:extLst>
+          </p:cNvPr>
+          <p:cNvPicPr>
+            <a:picLocks noChangeAspect="1"/>
+          </p:cNvPicPr>
+          <p:nvPr/>
+        </p:nvPicPr>
+        <p:blipFill>
+          <a:blip r:embed="rId3"/>
+          <a:srcRect l="20492"/>
+          <a:stretch>
+            <a:fillRect/>
+          </a:stretch>
+        </p:blipFill>
+        <p:spPr>
+          <a:xfrm>
+            <a:off x="4399807" y="2679262"/>
+            <a:ext cx="3453345" cy="1984107"/>
+          </a:xfrm>
+          <a:prstGeom prst="rect">
+            <a:avLst/>
+          </a:prstGeom>
+        </p:spPr>
+      </p:pic>
+      <p:pic>
+        <p:nvPicPr>
+          <p:cNvPr id="58" name="Picture 57">
+            <a:extLst>
+              <a:ext uri="{FF2B5EF4-FFF2-40B4-BE49-F238E27FC236}">
+                <a16:creationId xmlns:a16="http://schemas.microsoft.com/office/drawing/2014/main" id="{901F5FC8-0FD7-686E-94F0-EA1F223ACCDB}"/>
+              </a:ext>
+            </a:extLst>
+          </p:cNvPr>
+          <p:cNvPicPr>
+            <a:picLocks noChangeAspect="1"/>
+          </p:cNvPicPr>
+          <p:nvPr/>
+        </p:nvPicPr>
+        <p:blipFill>
+          <a:blip r:embed="rId4"/>
+          <a:srcRect l="21942"/>
+          <a:stretch>
+            <a:fillRect/>
+          </a:stretch>
+        </p:blipFill>
+        <p:spPr>
+          <a:xfrm>
+            <a:off x="8422776" y="2678139"/>
+            <a:ext cx="3405574" cy="1985230"/>
+          </a:xfrm>
+          <a:prstGeom prst="rect">
+            <a:avLst/>
+          </a:prstGeom>
+        </p:spPr>
+      </p:pic>
+      <p:pic>
+        <p:nvPicPr>
+          <p:cNvPr id="60" name="Picture 59">
+            <a:extLst>
+              <a:ext uri="{FF2B5EF4-FFF2-40B4-BE49-F238E27FC236}">
+                <a16:creationId xmlns:a16="http://schemas.microsoft.com/office/drawing/2014/main" id="{C1C13CF2-585D-3994-5ECF-08C3C7EA7474}"/>
+              </a:ext>
+            </a:extLst>
+          </p:cNvPr>
+          <p:cNvPicPr>
+            <a:picLocks noChangeAspect="1"/>
+          </p:cNvPicPr>
+          <p:nvPr/>
+        </p:nvPicPr>
+        <p:blipFill>
+          <a:blip r:embed="rId5"/>
+          <a:srcRect l="20812"/>
+          <a:stretch>
+            <a:fillRect/>
+          </a:stretch>
+        </p:blipFill>
+        <p:spPr>
+          <a:xfrm>
+            <a:off x="413570" y="2679262"/>
+            <a:ext cx="3444896" cy="1984107"/>
+          </a:xfrm>
+          <a:prstGeom prst="rect">
+            <a:avLst/>
+          </a:prstGeom>
+        </p:spPr>
+      </p:pic>
     </p:spTree>
   </p:cSld>
   <p:clrMapOvr>
     <a:masterClrMapping/>
   </p:clrMapOvr>
+  <mc:AlternateContent xmlns:mc="http://schemas.openxmlformats.org/markup-compatibility/2006">
+    <mc:Choice xmlns:p159="http://schemas.microsoft.com/office/powerpoint/2015/09/main" Requires="p159">
+      <p:transition xmlns:p14="http://schemas.microsoft.com/office/powerpoint/2010/main" spd="slow" p14:dur="2000">
+        <p159:morph option="byObject"/>
+      </p:transition>
+    </mc:Choice>
+    <mc:Fallback>
+      <p:transition spd="slow">
+        <p:fade/>
+      </p:transition>
+    </mc:Fallback>
+  </mc:AlternateContent>
 </p:sld>
 </file>
 
